--- a/internal_doc/00.项目管理/01.会议纪要/SequoiaDB 1.8版本回顾会议_20140707.pptx
+++ b/internal_doc/00.项目管理/01.会议纪要/SequoiaDB 1.8版本回顾会议_20140707.pptx
@@ -5,16 +5,18 @@
     <p:sldMasterId id="2147483648" r:id="rId1"/>
   </p:sldMasterIdLst>
   <p:notesMasterIdLst>
-    <p:notesMasterId r:id="rId9"/>
+    <p:notesMasterId r:id="rId11"/>
   </p:notesMasterIdLst>
   <p:sldIdLst>
     <p:sldId id="256" r:id="rId2"/>
     <p:sldId id="269" r:id="rId3"/>
     <p:sldId id="268" r:id="rId4"/>
     <p:sldId id="270" r:id="rId5"/>
-    <p:sldId id="271" r:id="rId6"/>
-    <p:sldId id="272" r:id="rId7"/>
-    <p:sldId id="267" r:id="rId8"/>
+    <p:sldId id="273" r:id="rId6"/>
+    <p:sldId id="271" r:id="rId7"/>
+    <p:sldId id="274" r:id="rId8"/>
+    <p:sldId id="272" r:id="rId9"/>
+    <p:sldId id="267" r:id="rId10"/>
   </p:sldIdLst>
   <p:sldSz cx="9144000" cy="6858000" type="screen4x3"/>
   <p:notesSz cx="6858000" cy="9144000"/>
@@ -463,6 +465,373 @@
     </a:lvl9pPr>
   </p:notesStyle>
 </p:notesMaster>
+</file>
+
+<file path=ppt/notesSlides/notesSlide1.xml><?xml version="1.0" encoding="utf-8"?>
+<p:notes xmlns:a="http://schemas.openxmlformats.org/drawingml/2006/main" xmlns:r="http://schemas.openxmlformats.org/officeDocument/2006/relationships" xmlns:p="http://schemas.openxmlformats.org/presentationml/2006/main">
+  <p:cSld>
+    <p:spTree>
+      <p:nvGrpSpPr>
+        <p:cNvPr id="1" name=""/>
+        <p:cNvGrpSpPr/>
+        <p:nvPr/>
+      </p:nvGrpSpPr>
+      <p:grpSpPr>
+        <a:xfrm>
+          <a:off x="0" y="0"/>
+          <a:ext cx="0" cy="0"/>
+          <a:chOff x="0" y="0"/>
+          <a:chExt cx="0" cy="0"/>
+        </a:xfrm>
+      </p:grpSpPr>
+      <p:sp>
+        <p:nvSpPr>
+          <p:cNvPr id="2" name="Slide Image Placeholder 1"/>
+          <p:cNvSpPr>
+            <a:spLocks noGrp="1" noRot="1" noChangeAspect="1"/>
+          </p:cNvSpPr>
+          <p:nvPr>
+            <p:ph type="sldImg"/>
+          </p:nvPr>
+        </p:nvSpPr>
+        <p:spPr/>
+      </p:sp>
+      <p:sp>
+        <p:nvSpPr>
+          <p:cNvPr id="3" name="Notes Placeholder 2"/>
+          <p:cNvSpPr>
+            <a:spLocks noGrp="1"/>
+          </p:cNvSpPr>
+          <p:nvPr>
+            <p:ph type="body" idx="1"/>
+          </p:nvPr>
+        </p:nvSpPr>
+        <p:spPr/>
+        <p:txBody>
+          <a:bodyPr>
+            <a:normAutofit/>
+          </a:bodyPr>
+          <a:lstStyle/>
+          <a:p>
+            <a:endParaRPr lang="zh-CN" altLang="en-US" dirty="0"/>
+          </a:p>
+        </p:txBody>
+      </p:sp>
+      <p:sp>
+        <p:nvSpPr>
+          <p:cNvPr id="4" name="Slide Number Placeholder 3"/>
+          <p:cNvSpPr>
+            <a:spLocks noGrp="1"/>
+          </p:cNvSpPr>
+          <p:nvPr>
+            <p:ph type="sldNum" sz="quarter" idx="10"/>
+          </p:nvPr>
+        </p:nvSpPr>
+        <p:spPr/>
+        <p:txBody>
+          <a:bodyPr/>
+          <a:lstStyle/>
+          <a:p>
+            <a:fld id="{9EDED305-2F38-4124-B22A-2A7AC7C037B9}" type="slidenum">
+              <a:rPr lang="zh-CN" altLang="en-US" smtClean="0"/>
+              <a:pPr/>
+              <a:t>3</a:t>
+            </a:fld>
+            <a:endParaRPr lang="zh-CN" altLang="en-US"/>
+          </a:p>
+        </p:txBody>
+      </p:sp>
+    </p:spTree>
+  </p:cSld>
+  <p:clrMapOvr>
+    <a:masterClrMapping/>
+  </p:clrMapOvr>
+</p:notes>
+</file>
+
+<file path=ppt/notesSlides/notesSlide2.xml><?xml version="1.0" encoding="utf-8"?>
+<p:notes xmlns:a="http://schemas.openxmlformats.org/drawingml/2006/main" xmlns:r="http://schemas.openxmlformats.org/officeDocument/2006/relationships" xmlns:p="http://schemas.openxmlformats.org/presentationml/2006/main">
+  <p:cSld>
+    <p:spTree>
+      <p:nvGrpSpPr>
+        <p:cNvPr id="1" name=""/>
+        <p:cNvGrpSpPr/>
+        <p:nvPr/>
+      </p:nvGrpSpPr>
+      <p:grpSpPr>
+        <a:xfrm>
+          <a:off x="0" y="0"/>
+          <a:ext cx="0" cy="0"/>
+          <a:chOff x="0" y="0"/>
+          <a:chExt cx="0" cy="0"/>
+        </a:xfrm>
+      </p:grpSpPr>
+      <p:sp>
+        <p:nvSpPr>
+          <p:cNvPr id="2" name="Slide Image Placeholder 1"/>
+          <p:cNvSpPr>
+            <a:spLocks noGrp="1" noRot="1" noChangeAspect="1"/>
+          </p:cNvSpPr>
+          <p:nvPr>
+            <p:ph type="sldImg"/>
+          </p:nvPr>
+        </p:nvSpPr>
+        <p:spPr/>
+      </p:sp>
+      <p:sp>
+        <p:nvSpPr>
+          <p:cNvPr id="3" name="Notes Placeholder 2"/>
+          <p:cNvSpPr>
+            <a:spLocks noGrp="1"/>
+          </p:cNvSpPr>
+          <p:nvPr>
+            <p:ph type="body" idx="1"/>
+          </p:nvPr>
+        </p:nvSpPr>
+        <p:spPr/>
+        <p:txBody>
+          <a:bodyPr>
+            <a:normAutofit/>
+          </a:bodyPr>
+          <a:lstStyle/>
+          <a:p>
+            <a:r>
+              <a:rPr lang="en-US" altLang="zh-CN" dirty="0" smtClean="0"/>
+              <a:t>CI</a:t>
+            </a:r>
+            <a:r>
+              <a:rPr lang="zh-CN" altLang="en-US" dirty="0" smtClean="0"/>
+              <a:t>缺少问题分发解决机制</a:t>
+            </a:r>
+            <a:endParaRPr lang="en-US" altLang="zh-CN" dirty="0" smtClean="0"/>
+          </a:p>
+          <a:p>
+            <a:r>
+              <a:rPr lang="en-US" altLang="zh-CN" dirty="0" smtClean="0"/>
+              <a:t>-</a:t>
+            </a:r>
+            <a:r>
+              <a:rPr lang="zh-CN" altLang="en-US" dirty="0" smtClean="0"/>
+              <a:t>测试用例包含作者名称</a:t>
+            </a:r>
+            <a:endParaRPr lang="en-US" altLang="zh-CN" dirty="0" smtClean="0"/>
+          </a:p>
+          <a:p>
+            <a:r>
+              <a:rPr lang="en-US" altLang="zh-CN" dirty="0" smtClean="0"/>
+              <a:t>-CI</a:t>
+            </a:r>
+            <a:r>
+              <a:rPr lang="zh-CN" altLang="en-US" dirty="0" smtClean="0"/>
+              <a:t>出错能自动导出错误人员列表</a:t>
+            </a:r>
+            <a:endParaRPr lang="en-US" altLang="zh-CN" dirty="0" smtClean="0"/>
+          </a:p>
+          <a:p>
+            <a:r>
+              <a:rPr lang="en-US" altLang="zh-CN" dirty="0" smtClean="0"/>
+              <a:t>-</a:t>
+            </a:r>
+            <a:r>
+              <a:rPr lang="zh-CN" altLang="en-US" dirty="0" smtClean="0"/>
+              <a:t>测试用例按模块划分责任人</a:t>
+            </a:r>
+            <a:endParaRPr lang="en-US" altLang="zh-CN" dirty="0" smtClean="0"/>
+          </a:p>
+          <a:p>
+            <a:r>
+              <a:rPr lang="en-US" altLang="zh-CN" dirty="0" smtClean="0"/>
+              <a:t>-</a:t>
+            </a:r>
+            <a:r>
+              <a:rPr lang="zh-CN" altLang="en-US" dirty="0" smtClean="0"/>
+              <a:t>开发按模块划分责任人</a:t>
+            </a:r>
+            <a:endParaRPr lang="en-US" altLang="zh-CN" dirty="0" smtClean="0"/>
+          </a:p>
+          <a:p>
+            <a:endParaRPr lang="en-US" altLang="zh-CN" dirty="0" smtClean="0"/>
+          </a:p>
+          <a:p>
+            <a:endParaRPr lang="en-US" altLang="zh-CN" dirty="0" smtClean="0"/>
+          </a:p>
+        </p:txBody>
+      </p:sp>
+      <p:sp>
+        <p:nvSpPr>
+          <p:cNvPr id="4" name="Slide Number Placeholder 3"/>
+          <p:cNvSpPr>
+            <a:spLocks noGrp="1"/>
+          </p:cNvSpPr>
+          <p:nvPr>
+            <p:ph type="sldNum" sz="quarter" idx="10"/>
+          </p:nvPr>
+        </p:nvSpPr>
+        <p:spPr/>
+        <p:txBody>
+          <a:bodyPr/>
+          <a:lstStyle/>
+          <a:p>
+            <a:fld id="{9EDED305-2F38-4124-B22A-2A7AC7C037B9}" type="slidenum">
+              <a:rPr lang="zh-CN" altLang="en-US" smtClean="0"/>
+              <a:pPr/>
+              <a:t>7</a:t>
+            </a:fld>
+            <a:endParaRPr lang="zh-CN" altLang="en-US"/>
+          </a:p>
+        </p:txBody>
+      </p:sp>
+    </p:spTree>
+  </p:cSld>
+  <p:clrMapOvr>
+    <a:masterClrMapping/>
+  </p:clrMapOvr>
+</p:notes>
+</file>
+
+<file path=ppt/notesSlides/notesSlide3.xml><?xml version="1.0" encoding="utf-8"?>
+<p:notes xmlns:a="http://schemas.openxmlformats.org/drawingml/2006/main" xmlns:r="http://schemas.openxmlformats.org/officeDocument/2006/relationships" xmlns:p="http://schemas.openxmlformats.org/presentationml/2006/main">
+  <p:cSld>
+    <p:spTree>
+      <p:nvGrpSpPr>
+        <p:cNvPr id="1" name=""/>
+        <p:cNvGrpSpPr/>
+        <p:nvPr/>
+      </p:nvGrpSpPr>
+      <p:grpSpPr>
+        <a:xfrm>
+          <a:off x="0" y="0"/>
+          <a:ext cx="0" cy="0"/>
+          <a:chOff x="0" y="0"/>
+          <a:chExt cx="0" cy="0"/>
+        </a:xfrm>
+      </p:grpSpPr>
+      <p:sp>
+        <p:nvSpPr>
+          <p:cNvPr id="2" name="Slide Image Placeholder 1"/>
+          <p:cNvSpPr>
+            <a:spLocks noGrp="1" noRot="1" noChangeAspect="1"/>
+          </p:cNvSpPr>
+          <p:nvPr>
+            <p:ph type="sldImg"/>
+          </p:nvPr>
+        </p:nvSpPr>
+        <p:spPr/>
+      </p:sp>
+      <p:sp>
+        <p:nvSpPr>
+          <p:cNvPr id="3" name="Notes Placeholder 2"/>
+          <p:cNvSpPr>
+            <a:spLocks noGrp="1"/>
+          </p:cNvSpPr>
+          <p:nvPr>
+            <p:ph type="body" idx="1"/>
+          </p:nvPr>
+        </p:nvSpPr>
+        <p:spPr/>
+        <p:txBody>
+          <a:bodyPr>
+            <a:normAutofit/>
+          </a:bodyPr>
+          <a:lstStyle/>
+          <a:p>
+            <a:r>
+              <a:rPr lang="zh-CN" altLang="en-US" dirty="0" smtClean="0"/>
+              <a:t>文净：自我要求严格；工作专注；主动；工作负责，承担很多性能的测试数据；乐于帮助他人成长；；</a:t>
+            </a:r>
+            <a:endParaRPr lang="en-US" altLang="zh-CN" dirty="0" smtClean="0"/>
+          </a:p>
+          <a:p>
+            <a:r>
+              <a:rPr lang="zh-CN" altLang="en-US" dirty="0" smtClean="0"/>
+              <a:t>晓均：工作认真，细心细化测试用例，培训很认真；主动承担</a:t>
+            </a:r>
+            <a:r>
+              <a:rPr lang="en-US" altLang="zh-CN" dirty="0" smtClean="0"/>
+              <a:t>CI</a:t>
+            </a:r>
+            <a:r>
+              <a:rPr lang="zh-CN" altLang="en-US" dirty="0" smtClean="0"/>
+              <a:t>测试的问题；主动承担测试工作；</a:t>
+            </a:r>
+            <a:endParaRPr lang="en-US" altLang="zh-CN" dirty="0" smtClean="0"/>
+          </a:p>
+          <a:p>
+            <a:r>
+              <a:rPr lang="zh-CN" altLang="en-US" dirty="0" smtClean="0"/>
+              <a:t>钊波：负责各种驱动，比较有耐心，工作比较积极</a:t>
+            </a:r>
+            <a:r>
+              <a:rPr lang="en-US" altLang="zh-CN" dirty="0" smtClean="0"/>
+              <a:t>; </a:t>
+            </a:r>
+            <a:r>
+              <a:rPr lang="zh-CN" altLang="en-US" dirty="0" smtClean="0"/>
+              <a:t>责任心强；极积处理测试的</a:t>
+            </a:r>
+            <a:r>
+              <a:rPr lang="zh-CN" altLang="en-US" smtClean="0"/>
+              <a:t>问题；</a:t>
+            </a:r>
+            <a:endParaRPr lang="en-US" altLang="zh-CN" dirty="0" smtClean="0"/>
+          </a:p>
+          <a:p>
+            <a:r>
+              <a:rPr lang="zh-CN" altLang="en-US" dirty="0" smtClean="0"/>
+              <a:t>刘圳：精益求精，开发</a:t>
+            </a:r>
+            <a:r>
+              <a:rPr lang="en-US" altLang="zh-CN" dirty="0" smtClean="0"/>
+              <a:t>python</a:t>
+            </a:r>
+            <a:r>
+              <a:rPr lang="zh-CN" altLang="en-US" dirty="0" smtClean="0"/>
+              <a:t>驱动自我要求严</a:t>
+            </a:r>
+            <a:endParaRPr lang="en-US" altLang="zh-CN" dirty="0" smtClean="0"/>
+          </a:p>
+          <a:p>
+            <a:r>
+              <a:rPr lang="zh-CN" altLang="en-US" dirty="0" smtClean="0"/>
+              <a:t>普升：数据库经验非常丰富；</a:t>
+            </a:r>
+            <a:endParaRPr lang="en-US" altLang="zh-CN" dirty="0" smtClean="0"/>
+          </a:p>
+          <a:p>
+            <a:endParaRPr lang="en-US" altLang="zh-CN" dirty="0" smtClean="0"/>
+          </a:p>
+        </p:txBody>
+      </p:sp>
+      <p:sp>
+        <p:nvSpPr>
+          <p:cNvPr id="4" name="Slide Number Placeholder 3"/>
+          <p:cNvSpPr>
+            <a:spLocks noGrp="1"/>
+          </p:cNvSpPr>
+          <p:nvPr>
+            <p:ph type="sldNum" sz="quarter" idx="10"/>
+          </p:nvPr>
+        </p:nvSpPr>
+        <p:spPr/>
+        <p:txBody>
+          <a:bodyPr/>
+          <a:lstStyle/>
+          <a:p>
+            <a:fld id="{9EDED305-2F38-4124-B22A-2A7AC7C037B9}" type="slidenum">
+              <a:rPr lang="zh-CN" altLang="en-US" smtClean="0"/>
+              <a:pPr/>
+              <a:t>8</a:t>
+            </a:fld>
+            <a:endParaRPr lang="zh-CN" altLang="en-US"/>
+          </a:p>
+        </p:txBody>
+      </p:sp>
+    </p:spTree>
+  </p:cSld>
+  <p:clrMapOvr>
+    <a:masterClrMapping/>
+  </p:clrMapOvr>
+</p:notes>
 </file>
 
 <file path=ppt/slideLayouts/slideLayout1.xml><?xml version="1.0" encoding="utf-8"?>
@@ -2542,23 +2911,7 @@
           <a:p>
             <a:r>
               <a:rPr lang="zh-CN" altLang="en-US" dirty="0" smtClean="0"/>
-              <a:t>内</a:t>
-            </a:r>
-            <a:r>
-              <a:rPr lang="zh-CN" altLang="en-US" dirty="0" smtClean="0"/>
-              <a:t>部</a:t>
-            </a:r>
-            <a:r>
-              <a:rPr lang="zh-CN" altLang="en-US" dirty="0" smtClean="0"/>
-              <a:t>会议</a:t>
-            </a:r>
-            <a:r>
-              <a:rPr lang="zh-CN" altLang="en-US" dirty="0" smtClean="0"/>
-              <a:t>资</a:t>
-            </a:r>
-            <a:r>
-              <a:rPr lang="zh-CN" altLang="en-US" dirty="0" smtClean="0"/>
-              <a:t>料</a:t>
+              <a:t>内部会议资料</a:t>
             </a:r>
             <a:endParaRPr lang="zh-CN" altLang="en-US" dirty="0"/>
           </a:p>
@@ -2700,6 +3053,13 @@
   <p:clrMapOvr>
     <a:masterClrMapping/>
   </p:clrMapOvr>
+  <p:timing>
+    <p:tnLst>
+      <p:par>
+        <p:cTn id="1" dur="indefinite" restart="never" nodeType="tmRoot"/>
+      </p:par>
+    </p:tnLst>
+  </p:timing>
 </p:sld>
 </file>
 
@@ -2812,6 +3172,13 @@
   <p:clrMapOvr>
     <a:masterClrMapping/>
   </p:clrMapOvr>
+  <p:timing>
+    <p:tnLst>
+      <p:par>
+        <p:cTn id="1" dur="indefinite" restart="never" nodeType="tmRoot"/>
+      </p:par>
+    </p:tnLst>
+  </p:timing>
 </p:sld>
 </file>
 
@@ -2898,6 +3265,13 @@
   <p:clrMapOvr>
     <a:masterClrMapping/>
   </p:clrMapOvr>
+  <p:timing>
+    <p:tnLst>
+      <p:par>
+        <p:cTn id="1" dur="indefinite" restart="never" nodeType="tmRoot"/>
+      </p:par>
+    </p:tnLst>
+  </p:timing>
 </p:sld>
 </file>
 
@@ -2935,7 +3309,15 @@
           <a:p>
             <a:r>
               <a:rPr lang="zh-CN" altLang="en-US" dirty="0" smtClean="0"/>
-              <a:t>优化改进</a:t>
+              <a:t>成果巩固（</a:t>
+            </a:r>
+            <a:r>
+              <a:rPr lang="en-US" altLang="zh-CN" dirty="0" smtClean="0"/>
+              <a:t>2</a:t>
+            </a:r>
+            <a:r>
+              <a:rPr lang="zh-CN" altLang="en-US" dirty="0" smtClean="0"/>
+              <a:t>）</a:t>
             </a:r>
             <a:endParaRPr lang="zh-CN" altLang="en-US" dirty="0"/>
           </a:p>
@@ -2957,42 +3339,117 @@
           <a:lstStyle/>
           <a:p>
             <a:r>
-              <a:rPr lang="zh-CN" altLang="en-US" dirty="0" smtClean="0"/>
-              <a:t>团队成员发言讨论该版本做的不好的地方，以及好的想法和点子</a:t>
+              <a:rPr lang="en-US" altLang="zh-CN" dirty="0" smtClean="0"/>
+              <a:t>JIRA</a:t>
+            </a:r>
+            <a:r>
+              <a:rPr lang="zh-CN" altLang="en-US" dirty="0" smtClean="0"/>
+              <a:t>流程中修改问题中包含</a:t>
+            </a:r>
+            <a:r>
+              <a:rPr lang="en-US" altLang="zh-CN" dirty="0" smtClean="0"/>
+              <a:t>SVN</a:t>
+            </a:r>
+            <a:r>
+              <a:rPr lang="zh-CN" altLang="en-US" dirty="0" smtClean="0"/>
+              <a:t>号  （</a:t>
+            </a:r>
+            <a:r>
+              <a:rPr lang="en-US" altLang="zh-CN" dirty="0" smtClean="0"/>
+              <a:t>1</a:t>
+            </a:r>
+            <a:r>
+              <a:rPr lang="zh-CN" altLang="en-US" dirty="0" smtClean="0"/>
+              <a:t>）</a:t>
             </a:r>
             <a:endParaRPr lang="en-US" altLang="zh-CN" dirty="0" smtClean="0"/>
           </a:p>
           <a:p>
             <a:r>
               <a:rPr lang="zh-CN" altLang="en-US" dirty="0" smtClean="0"/>
-              <a:t>团队成员投票选出</a:t>
-            </a:r>
-            <a:r>
-              <a:rPr lang="en-US" altLang="zh-CN" dirty="0" smtClean="0"/>
-              <a:t>TOP3</a:t>
-            </a:r>
-            <a:r>
-              <a:rPr lang="zh-CN" altLang="en-US" dirty="0" smtClean="0"/>
-              <a:t>不好的地方和点子</a:t>
+              <a:t>开展测试用例规范化整理</a:t>
             </a:r>
             <a:endParaRPr lang="en-US" altLang="zh-CN" dirty="0" smtClean="0"/>
           </a:p>
           <a:p>
             <a:r>
               <a:rPr lang="zh-CN" altLang="en-US" dirty="0" smtClean="0"/>
-              <a:t>团队成员共同讨论</a:t>
-            </a:r>
-            <a:r>
-              <a:rPr lang="en-US" altLang="zh-CN" dirty="0" smtClean="0"/>
-              <a:t>TOP3</a:t>
-            </a:r>
-            <a:r>
-              <a:rPr lang="zh-CN" altLang="en-US" dirty="0" smtClean="0"/>
-              <a:t>不好的地方的改进点和点子的实施办法，并制订措施，在下一版本改进实施</a:t>
+              <a:t>开发测试都能正常按计划完成工作</a:t>
             </a:r>
             <a:endParaRPr lang="en-US" altLang="zh-CN" dirty="0" smtClean="0"/>
           </a:p>
           <a:p>
+            <a:r>
+              <a:rPr lang="zh-CN" altLang="en-US" dirty="0" smtClean="0"/>
+              <a:t>开展培训课程 （</a:t>
+            </a:r>
+            <a:r>
+              <a:rPr lang="en-US" altLang="zh-CN" dirty="0" smtClean="0"/>
+              <a:t>2</a:t>
+            </a:r>
+            <a:r>
+              <a:rPr lang="zh-CN" altLang="en-US" dirty="0" smtClean="0"/>
+              <a:t>）</a:t>
+            </a:r>
+            <a:endParaRPr lang="en-US" altLang="zh-CN" dirty="0" smtClean="0"/>
+          </a:p>
+          <a:p>
+            <a:r>
+              <a:rPr lang="zh-CN" altLang="en-US" dirty="0" smtClean="0"/>
+              <a:t>版本周例会</a:t>
+            </a:r>
+            <a:endParaRPr lang="en-US" altLang="zh-CN" dirty="0" smtClean="0"/>
+          </a:p>
+          <a:p>
+            <a:r>
+              <a:rPr lang="en-US" altLang="zh-CN" dirty="0" smtClean="0"/>
+              <a:t>CI</a:t>
+            </a:r>
+            <a:r>
+              <a:rPr lang="zh-CN" altLang="en-US" dirty="0" smtClean="0"/>
+              <a:t>持续集成，保证版本质量</a:t>
+            </a:r>
+            <a:endParaRPr lang="en-US" altLang="zh-CN" dirty="0" smtClean="0"/>
+          </a:p>
+          <a:p>
+            <a:r>
+              <a:rPr lang="zh-CN" altLang="en-US" dirty="0" smtClean="0"/>
+              <a:t>开展</a:t>
+            </a:r>
+            <a:r>
+              <a:rPr lang="en-US" altLang="zh-CN" dirty="0" smtClean="0"/>
+              <a:t>SequoiaDB</a:t>
+            </a:r>
+            <a:r>
+              <a:rPr lang="zh-CN" altLang="en-US" dirty="0" smtClean="0"/>
+              <a:t>场景测试，从实质角度进行测试 （</a:t>
+            </a:r>
+            <a:r>
+              <a:rPr lang="en-US" altLang="zh-CN" dirty="0" smtClean="0"/>
+              <a:t>3</a:t>
+            </a:r>
+            <a:r>
+              <a:rPr lang="zh-CN" altLang="en-US" dirty="0" smtClean="0"/>
+              <a:t>）</a:t>
+            </a:r>
+            <a:endParaRPr lang="en-US" altLang="zh-CN" dirty="0" smtClean="0"/>
+          </a:p>
+          <a:p>
+            <a:r>
+              <a:rPr lang="en-US" altLang="zh-CN" dirty="0" smtClean="0"/>
+              <a:t>Story</a:t>
+            </a:r>
+            <a:r>
+              <a:rPr lang="zh-CN" altLang="en-US" dirty="0" smtClean="0"/>
+              <a:t>开发流程</a:t>
+            </a:r>
+            <a:endParaRPr lang="en-US" altLang="zh-CN" dirty="0" smtClean="0"/>
+          </a:p>
+          <a:p>
+            <a:r>
+              <a:rPr lang="zh-CN" altLang="en-US" dirty="0" smtClean="0"/>
+              <a:t>个人需求点反馈和实现机制</a:t>
+            </a:r>
             <a:endParaRPr lang="zh-CN" altLang="en-US" dirty="0"/>
           </a:p>
         </p:txBody>
@@ -3002,6 +3459,13 @@
   <p:clrMapOvr>
     <a:masterClrMapping/>
   </p:clrMapOvr>
+  <p:timing>
+    <p:tnLst>
+      <p:par>
+        <p:cTn id="1" dur="indefinite" restart="never" nodeType="tmRoot"/>
+      </p:par>
+    </p:tnLst>
+  </p:timing>
 </p:sld>
 </file>
 
@@ -3039,7 +3503,7 @@
           <a:p>
             <a:r>
               <a:rPr lang="zh-CN" altLang="en-US" dirty="0" smtClean="0"/>
-              <a:t>版本荣誉墙</a:t>
+              <a:t>优化改进</a:t>
             </a:r>
             <a:endParaRPr lang="zh-CN" altLang="en-US" dirty="0"/>
           </a:p>
@@ -3062,16 +3526,41 @@
           <a:p>
             <a:r>
               <a:rPr lang="zh-CN" altLang="en-US" dirty="0" smtClean="0"/>
-              <a:t>团队成员评选该版本优秀的人物和事迹（成长、积极、主动、贡献、分享等各方面） </a:t>
-            </a:r>
-            <a:r>
-              <a:rPr lang="en-US" altLang="zh-CN" dirty="0" smtClean="0"/>
-              <a:t>1~2</a:t>
-            </a:r>
-            <a:r>
-              <a:rPr lang="zh-CN" altLang="en-US" dirty="0" smtClean="0"/>
-              <a:t>人</a:t>
-            </a:r>
+              <a:t>团队成员发言讨论该版本做的不好的地方，以及好的想法和点子</a:t>
+            </a:r>
+            <a:endParaRPr lang="en-US" altLang="zh-CN" dirty="0" smtClean="0"/>
+          </a:p>
+          <a:p>
+            <a:r>
+              <a:rPr lang="zh-CN" altLang="en-US" dirty="0" smtClean="0"/>
+              <a:t>团队成员投票选出</a:t>
+            </a:r>
+            <a:r>
+              <a:rPr lang="en-US" altLang="zh-CN" dirty="0" smtClean="0"/>
+              <a:t>TOP3</a:t>
+            </a:r>
+            <a:r>
+              <a:rPr lang="zh-CN" altLang="en-US" dirty="0" smtClean="0"/>
+              <a:t>不好的地方和点子</a:t>
+            </a:r>
+            <a:endParaRPr lang="en-US" altLang="zh-CN" dirty="0" smtClean="0"/>
+          </a:p>
+          <a:p>
+            <a:r>
+              <a:rPr lang="zh-CN" altLang="en-US" dirty="0" smtClean="0"/>
+              <a:t>团队成员共同讨论</a:t>
+            </a:r>
+            <a:r>
+              <a:rPr lang="en-US" altLang="zh-CN" dirty="0" smtClean="0"/>
+              <a:t>TOP3</a:t>
+            </a:r>
+            <a:r>
+              <a:rPr lang="zh-CN" altLang="en-US" dirty="0" smtClean="0"/>
+              <a:t>不好的地方的改进点和点子的实施办法，并制订措施，在下一版本改进实施</a:t>
+            </a:r>
+            <a:endParaRPr lang="en-US" altLang="zh-CN" dirty="0" smtClean="0"/>
+          </a:p>
+          <a:p>
             <a:endParaRPr lang="zh-CN" altLang="en-US" dirty="0"/>
           </a:p>
         </p:txBody>
@@ -3081,10 +3570,387 @@
   <p:clrMapOvr>
     <a:masterClrMapping/>
   </p:clrMapOvr>
+  <p:timing>
+    <p:tnLst>
+      <p:par>
+        <p:cTn id="1" dur="indefinite" restart="never" nodeType="tmRoot"/>
+      </p:par>
+    </p:tnLst>
+  </p:timing>
 </p:sld>
 </file>
 
 <file path=ppt/slides/slide7.xml><?xml version="1.0" encoding="utf-8"?>
+<p:sld xmlns:a="http://schemas.openxmlformats.org/drawingml/2006/main" xmlns:r="http://schemas.openxmlformats.org/officeDocument/2006/relationships" xmlns:p="http://schemas.openxmlformats.org/presentationml/2006/main">
+  <p:cSld>
+    <p:spTree>
+      <p:nvGrpSpPr>
+        <p:cNvPr id="1" name=""/>
+        <p:cNvGrpSpPr/>
+        <p:nvPr/>
+      </p:nvGrpSpPr>
+      <p:grpSpPr>
+        <a:xfrm>
+          <a:off x="0" y="0"/>
+          <a:ext cx="0" cy="0"/>
+          <a:chOff x="0" y="0"/>
+          <a:chExt cx="0" cy="0"/>
+        </a:xfrm>
+      </p:grpSpPr>
+      <p:sp>
+        <p:nvSpPr>
+          <p:cNvPr id="2" name="Title 1"/>
+          <p:cNvSpPr>
+            <a:spLocks noGrp="1"/>
+          </p:cNvSpPr>
+          <p:nvPr>
+            <p:ph type="title"/>
+          </p:nvPr>
+        </p:nvSpPr>
+        <p:spPr/>
+        <p:txBody>
+          <a:bodyPr/>
+          <a:lstStyle/>
+          <a:p>
+            <a:r>
+              <a:rPr lang="zh-CN" altLang="en-US" dirty="0" smtClean="0"/>
+              <a:t>优化改进（</a:t>
+            </a:r>
+            <a:r>
+              <a:rPr lang="en-US" altLang="zh-CN" dirty="0" smtClean="0"/>
+              <a:t>2</a:t>
+            </a:r>
+            <a:r>
+              <a:rPr lang="zh-CN" altLang="en-US" dirty="0" smtClean="0"/>
+              <a:t>）</a:t>
+            </a:r>
+            <a:endParaRPr lang="zh-CN" altLang="en-US" dirty="0"/>
+          </a:p>
+        </p:txBody>
+      </p:sp>
+      <p:sp>
+        <p:nvSpPr>
+          <p:cNvPr id="3" name="Content Placeholder 2"/>
+          <p:cNvSpPr>
+            <a:spLocks noGrp="1"/>
+          </p:cNvSpPr>
+          <p:nvPr>
+            <p:ph idx="1"/>
+          </p:nvPr>
+        </p:nvSpPr>
+        <p:spPr/>
+        <p:txBody>
+          <a:bodyPr>
+            <a:normAutofit fontScale="85000" lnSpcReduction="10000"/>
+          </a:bodyPr>
+          <a:lstStyle/>
+          <a:p>
+            <a:r>
+              <a:rPr lang="zh-CN" altLang="en-US" dirty="0" smtClean="0"/>
+              <a:t>发现问题，没有提单  </a:t>
+            </a:r>
+            <a:r>
+              <a:rPr lang="en-US" altLang="zh-CN" dirty="0" smtClean="0"/>
+              <a:t>5  -- </a:t>
+            </a:r>
+            <a:r>
+              <a:rPr lang="zh-CN" altLang="en-US" dirty="0" smtClean="0"/>
+              <a:t>规范</a:t>
+            </a:r>
+            <a:r>
+              <a:rPr lang="en-US" altLang="zh-CN" dirty="0" smtClean="0"/>
+              <a:t>JIRA</a:t>
+            </a:r>
+            <a:r>
+              <a:rPr lang="zh-CN" altLang="en-US" dirty="0" smtClean="0"/>
+              <a:t>提单流程</a:t>
+            </a:r>
+            <a:endParaRPr lang="en-US" altLang="zh-CN" dirty="0" smtClean="0"/>
+          </a:p>
+          <a:p>
+            <a:r>
+              <a:rPr lang="zh-CN" altLang="en-US" dirty="0" smtClean="0"/>
+              <a:t>资料更新太慢，资料不够详细（建议：文档也在测试范围内）  </a:t>
+            </a:r>
+            <a:r>
+              <a:rPr lang="en-US" altLang="zh-CN" dirty="0" smtClean="0"/>
+              <a:t>4</a:t>
+            </a:r>
+          </a:p>
+          <a:p>
+            <a:r>
+              <a:rPr lang="zh-CN" altLang="en-US" dirty="0" smtClean="0"/>
+              <a:t>缺少完整的述语表，很多模块不知道什么意义  </a:t>
+            </a:r>
+            <a:r>
+              <a:rPr lang="en-US" altLang="zh-CN" dirty="0" smtClean="0"/>
+              <a:t>5</a:t>
+            </a:r>
+          </a:p>
+          <a:p>
+            <a:pPr lvl="1"/>
+            <a:r>
+              <a:rPr lang="zh-CN" altLang="en-US" dirty="0" smtClean="0"/>
+              <a:t>规范</a:t>
+            </a:r>
+            <a:r>
+              <a:rPr lang="en-US" altLang="zh-CN" dirty="0" err="1" smtClean="0"/>
+              <a:t>Sequoiadb</a:t>
+            </a:r>
+            <a:r>
+              <a:rPr lang="zh-CN" altLang="en-US" dirty="0" smtClean="0"/>
+              <a:t>述语和概念</a:t>
+            </a:r>
+            <a:endParaRPr lang="en-US" altLang="zh-CN" dirty="0" smtClean="0"/>
+          </a:p>
+          <a:p>
+            <a:r>
+              <a:rPr lang="en-US" altLang="zh-CN" dirty="0" smtClean="0"/>
+              <a:t>Story</a:t>
+            </a:r>
+            <a:r>
+              <a:rPr lang="zh-CN" altLang="en-US" dirty="0" smtClean="0"/>
+              <a:t>设计交流不足，</a:t>
+            </a:r>
+            <a:r>
+              <a:rPr lang="en-US" altLang="zh-CN" dirty="0" smtClean="0"/>
+              <a:t>Story</a:t>
+            </a:r>
+            <a:r>
+              <a:rPr lang="zh-CN" altLang="en-US" dirty="0" smtClean="0"/>
+              <a:t>开发文档不完善  </a:t>
+            </a:r>
+            <a:r>
+              <a:rPr lang="en-US" altLang="zh-CN" dirty="0" smtClean="0"/>
+              <a:t>5</a:t>
+            </a:r>
+          </a:p>
+          <a:p>
+            <a:pPr lvl="1"/>
+            <a:r>
+              <a:rPr lang="zh-CN" altLang="en-US" dirty="0" smtClean="0"/>
+              <a:t>彻实落实</a:t>
+            </a:r>
+            <a:r>
+              <a:rPr lang="en-US" altLang="zh-CN" dirty="0" smtClean="0"/>
+              <a:t>Story</a:t>
+            </a:r>
+            <a:r>
+              <a:rPr lang="zh-CN" altLang="en-US" dirty="0" smtClean="0"/>
+              <a:t>开发流程</a:t>
+            </a:r>
+            <a:endParaRPr lang="en-US" altLang="zh-CN" dirty="0" smtClean="0"/>
+          </a:p>
+          <a:p>
+            <a:r>
+              <a:rPr lang="zh-CN" altLang="en-US" dirty="0" smtClean="0"/>
+              <a:t>开发人员提交代码没有写</a:t>
+            </a:r>
+            <a:r>
+              <a:rPr lang="en-US" altLang="zh-CN" dirty="0" smtClean="0"/>
+              <a:t>SVN</a:t>
+            </a:r>
+            <a:r>
+              <a:rPr lang="zh-CN" altLang="en-US" dirty="0" smtClean="0"/>
+              <a:t>备注 </a:t>
+            </a:r>
+            <a:r>
+              <a:rPr lang="en-US" altLang="zh-CN" dirty="0" smtClean="0"/>
+              <a:t>3</a:t>
+            </a:r>
+          </a:p>
+          <a:p>
+            <a:r>
+              <a:rPr lang="zh-CN" altLang="en-US" dirty="0" smtClean="0"/>
+              <a:t>版本中新功能点应提前</a:t>
+            </a:r>
+            <a:r>
+              <a:rPr lang="en-US" altLang="zh-CN" dirty="0" smtClean="0"/>
+              <a:t>2</a:t>
+            </a:r>
+            <a:r>
+              <a:rPr lang="zh-CN" altLang="en-US" dirty="0" smtClean="0"/>
+              <a:t>到</a:t>
+            </a:r>
+            <a:r>
+              <a:rPr lang="en-US" altLang="zh-CN" dirty="0" smtClean="0"/>
+              <a:t>3</a:t>
+            </a:r>
+            <a:r>
+              <a:rPr lang="zh-CN" altLang="en-US" dirty="0" smtClean="0"/>
+              <a:t>周测试完成 </a:t>
+            </a:r>
+            <a:r>
+              <a:rPr lang="en-US" altLang="zh-CN" dirty="0" smtClean="0"/>
+              <a:t>1</a:t>
+            </a:r>
+          </a:p>
+          <a:p>
+            <a:r>
+              <a:rPr lang="zh-CN" altLang="en-US" dirty="0" smtClean="0"/>
+              <a:t>测试点没有经过评审开始实施，依赖测试人员能力 </a:t>
+            </a:r>
+            <a:r>
+              <a:rPr lang="en-US" altLang="zh-CN" dirty="0" smtClean="0"/>
+              <a:t>5</a:t>
+            </a:r>
+          </a:p>
+          <a:p>
+            <a:pPr lvl="1"/>
+            <a:r>
+              <a:rPr lang="zh-CN" altLang="en-US" dirty="0" smtClean="0"/>
+              <a:t>完善</a:t>
+            </a:r>
+            <a:r>
+              <a:rPr lang="en-US" altLang="zh-CN" dirty="0" smtClean="0"/>
+              <a:t>Story</a:t>
+            </a:r>
+            <a:r>
+              <a:rPr lang="zh-CN" altLang="en-US" dirty="0" smtClean="0"/>
+              <a:t>测试流程</a:t>
+            </a:r>
+            <a:endParaRPr lang="en-US" altLang="zh-CN" dirty="0" smtClean="0"/>
+          </a:p>
+          <a:p>
+            <a:r>
+              <a:rPr lang="en-US" altLang="zh-CN" dirty="0" smtClean="0"/>
+              <a:t>6</a:t>
+            </a:r>
+          </a:p>
+          <a:p>
+            <a:r>
+              <a:rPr lang="zh-CN" altLang="en-US" dirty="0" smtClean="0"/>
+              <a:t>（建议：周例会经验分享继续下去）</a:t>
+            </a:r>
+            <a:endParaRPr lang="en-US" altLang="zh-CN" dirty="0" smtClean="0"/>
+          </a:p>
+        </p:txBody>
+      </p:sp>
+    </p:spTree>
+  </p:cSld>
+  <p:clrMapOvr>
+    <a:masterClrMapping/>
+  </p:clrMapOvr>
+  <p:timing>
+    <p:tnLst>
+      <p:par>
+        <p:cTn id="1" dur="indefinite" restart="never" nodeType="tmRoot"/>
+      </p:par>
+    </p:tnLst>
+  </p:timing>
+</p:sld>
+</file>
+
+<file path=ppt/slides/slide8.xml><?xml version="1.0" encoding="utf-8"?>
+<p:sld xmlns:a="http://schemas.openxmlformats.org/drawingml/2006/main" xmlns:r="http://schemas.openxmlformats.org/officeDocument/2006/relationships" xmlns:p="http://schemas.openxmlformats.org/presentationml/2006/main">
+  <p:cSld>
+    <p:spTree>
+      <p:nvGrpSpPr>
+        <p:cNvPr id="1" name=""/>
+        <p:cNvGrpSpPr/>
+        <p:nvPr/>
+      </p:nvGrpSpPr>
+      <p:grpSpPr>
+        <a:xfrm>
+          <a:off x="0" y="0"/>
+          <a:ext cx="0" cy="0"/>
+          <a:chOff x="0" y="0"/>
+          <a:chExt cx="0" cy="0"/>
+        </a:xfrm>
+      </p:grpSpPr>
+      <p:sp>
+        <p:nvSpPr>
+          <p:cNvPr id="2" name="Title 1"/>
+          <p:cNvSpPr>
+            <a:spLocks noGrp="1"/>
+          </p:cNvSpPr>
+          <p:nvPr>
+            <p:ph type="title"/>
+          </p:nvPr>
+        </p:nvSpPr>
+        <p:spPr/>
+        <p:txBody>
+          <a:bodyPr/>
+          <a:lstStyle/>
+          <a:p>
+            <a:r>
+              <a:rPr lang="zh-CN" altLang="en-US" dirty="0" smtClean="0"/>
+              <a:t>版本荣誉墙</a:t>
+            </a:r>
+            <a:endParaRPr lang="zh-CN" altLang="en-US" dirty="0"/>
+          </a:p>
+        </p:txBody>
+      </p:sp>
+      <p:sp>
+        <p:nvSpPr>
+          <p:cNvPr id="3" name="Content Placeholder 2"/>
+          <p:cNvSpPr>
+            <a:spLocks noGrp="1"/>
+          </p:cNvSpPr>
+          <p:nvPr>
+            <p:ph idx="1"/>
+          </p:nvPr>
+        </p:nvSpPr>
+        <p:spPr/>
+        <p:txBody>
+          <a:bodyPr/>
+          <a:lstStyle/>
+          <a:p>
+            <a:r>
+              <a:rPr lang="zh-CN" altLang="en-US" dirty="0" smtClean="0"/>
+              <a:t>团队成员评选该版本优秀的人物和事迹（成长、积极、主动、贡献、分享等各方面） </a:t>
+            </a:r>
+            <a:r>
+              <a:rPr lang="en-US" altLang="zh-CN" dirty="0" smtClean="0"/>
+              <a:t>1~2</a:t>
+            </a:r>
+            <a:r>
+              <a:rPr lang="zh-CN" altLang="en-US" dirty="0" smtClean="0"/>
+              <a:t>人</a:t>
+            </a:r>
+            <a:endParaRPr lang="en-US" altLang="zh-CN" dirty="0" smtClean="0"/>
+          </a:p>
+          <a:p>
+            <a:pPr lvl="1"/>
+            <a:r>
+              <a:rPr lang="zh-CN" altLang="en-US" dirty="0" smtClean="0"/>
+              <a:t>文净 </a:t>
+            </a:r>
+            <a:r>
+              <a:rPr lang="en-US" altLang="zh-CN" dirty="0" smtClean="0"/>
+              <a:t>7</a:t>
+            </a:r>
+          </a:p>
+          <a:p>
+            <a:pPr lvl="1"/>
+            <a:r>
+              <a:rPr lang="zh-CN" altLang="en-US" dirty="0" smtClean="0"/>
+              <a:t>晓均 </a:t>
+            </a:r>
+            <a:r>
+              <a:rPr lang="en-US" altLang="zh-CN" dirty="0" smtClean="0"/>
+              <a:t>8</a:t>
+            </a:r>
+            <a:endParaRPr lang="zh-CN" altLang="en-US" dirty="0"/>
+          </a:p>
+        </p:txBody>
+      </p:sp>
+    </p:spTree>
+  </p:cSld>
+  <p:clrMapOvr>
+    <a:masterClrMapping/>
+  </p:clrMapOvr>
+  <p:timing>
+    <p:tnLst>
+      <p:par>
+        <p:cTn id="1" dur="indefinite" restart="never" nodeType="tmRoot"/>
+      </p:par>
+    </p:tnLst>
+  </p:timing>
+</p:sld>
+</file>
+
+<file path=ppt/slides/slide9.xml><?xml version="1.0" encoding="utf-8"?>
 <p:sld xmlns:a="http://schemas.openxmlformats.org/drawingml/2006/main" xmlns:r="http://schemas.openxmlformats.org/officeDocument/2006/relationships" xmlns:p="http://schemas.openxmlformats.org/presentationml/2006/main">
   <p:cSld>
     <p:spTree>
